--- a/slides/slide_02.pptx
+++ b/slides/slide_02.pptx
@@ -26,61 +26,38 @@
       <p:bold r:id="rId9"/>
     </p:embeddedFont>
     <p:embeddedFont>
-      <p:font typeface="Bebas Neue" panose="020B0606020202050201" pitchFamily="2" charset="0"/>
+      <p:font typeface="Hanken Grotesk" panose="020B0604020202020204" charset="0"/>
       <p:regular r:id="rId10"/>
-    </p:embeddedFont>
-    <p:embeddedFont>
-      <p:font typeface="DM Mono" panose="020B0509040201040103" pitchFamily="1" charset="0"/>
-      <p:regular r:id="rId11"/>
+      <p:bold r:id="rId11"/>
       <p:italic r:id="rId12"/>
-    </p:embeddedFont>
-    <p:embeddedFont>
-      <p:font typeface="Hanken Grotesk" panose="020B0604020202020204" charset="0"/>
-      <p:regular r:id="rId13"/>
-      <p:bold r:id="rId14"/>
-      <p:italic r:id="rId15"/>
-      <p:boldItalic r:id="rId16"/>
-    </p:embeddedFont>
-    <p:embeddedFont>
-      <p:font typeface="Open Sans" panose="020B0606030504020204" pitchFamily="2" charset="0"/>
-      <p:regular r:id="rId17"/>
-      <p:bold r:id="rId18"/>
-      <p:italic r:id="rId19"/>
-      <p:boldItalic r:id="rId20"/>
+      <p:boldItalic r:id="rId13"/>
     </p:embeddedFont>
     <p:embeddedFont>
       <p:font typeface="Raleway" pitchFamily="2" charset="0"/>
-      <p:regular r:id="rId21"/>
-      <p:bold r:id="rId22"/>
-      <p:italic r:id="rId23"/>
-      <p:boldItalic r:id="rId24"/>
+      <p:regular r:id="rId14"/>
+      <p:bold r:id="rId15"/>
+      <p:italic r:id="rId16"/>
+      <p:boldItalic r:id="rId17"/>
     </p:embeddedFont>
     <p:embeddedFont>
       <p:font typeface="Raleway Black" pitchFamily="2" charset="0"/>
-      <p:bold r:id="rId25"/>
-      <p:boldItalic r:id="rId26"/>
+      <p:bold r:id="rId18"/>
+      <p:boldItalic r:id="rId19"/>
     </p:embeddedFont>
     <p:embeddedFont>
       <p:font typeface="Raleway ExtraBold" pitchFamily="2" charset="0"/>
-      <p:bold r:id="rId27"/>
-      <p:boldItalic r:id="rId28"/>
+      <p:bold r:id="rId20"/>
+      <p:boldItalic r:id="rId21"/>
     </p:embeddedFont>
     <p:embeddedFont>
       <p:font typeface="Roboto Medium" panose="02000000000000000000" pitchFamily="2" charset="0"/>
-      <p:regular r:id="rId29"/>
-      <p:italic r:id="rId30"/>
+      <p:regular r:id="rId22"/>
+      <p:italic r:id="rId23"/>
     </p:embeddedFont>
     <p:embeddedFont>
       <p:font typeface="Roboto" panose="02000000000000000000" pitchFamily="2"/>
-      <p:bold r:id="rId31"/>
-      <p:boldItalic r:id="rId32"/>
-    </p:embeddedFont>
-    <p:embeddedFont>
-      <p:font typeface="Segoe UI" panose="020B0502040204020203" pitchFamily="2" charset="0"/>
-      <p:regular r:id="rId33"/>
-      <p:bold r:id="rId34"/>
-      <p:italic r:id="rId35"/>
-      <p:boldItalic r:id="rId36"/>
+      <p:bold r:id="rId24"/>
+      <p:boldItalic r:id="rId25"/>
     </p:embeddedFont>
   </p:embeddedFontLst>
   <p:custDataLst>
@@ -909,7 +886,7 @@
           <a:bodyPr/>
           <a:lstStyle/>
           <a:p>
-            <a:fld id="{472ACD1B-2DB8-4FCF-8727-BAE3A10691DF}" type="datetimeFigureOut">
+            <a:fld id="{A5156A0B-CD3A-4364-A8B3-0FA8763E9F57}" type="datetimeFigureOut">
               <a:rPr lang="en-US" smtClean="0"/>
               <a:t>11/7/2009</a:t>
             </a:fld>
@@ -1073,7 +1050,7 @@
           <a:bodyPr/>
           <a:lstStyle/>
           <a:p>
-            <a:fld id="{2995F584-AE99-4BA6-8D4B-7F3892EF3C04}" type="datetimeFigureOut">
+            <a:fld id="{5F2553CF-E7EB-430D-B1A0-85F19504BBDD}" type="datetimeFigureOut">
               <a:rPr lang="en-US" smtClean="0"/>
               <a:t>11/7/2009</a:t>
             </a:fld>
@@ -1237,7 +1214,7 @@
           <a:bodyPr/>
           <a:lstStyle/>
           <a:p>
-            <a:fld id="{AF88569D-8433-4C55-B9B7-002DEE68FCBB}" type="datetimeFigureOut">
+            <a:fld id="{1F393D5A-D904-463D-9CC3-A77439BE8FC2}" type="datetimeFigureOut">
               <a:rPr lang="en-US" smtClean="0"/>
               <a:t>11/7/2009</a:t>
             </a:fld>
@@ -13142,7 +13119,7 @@
           <a:bodyPr/>
           <a:lstStyle/>
           <a:p>
-            <a:fld id="{B5738146-1F79-47E5-96B7-8F31F0A5352D}" type="datetimeFigureOut">
+            <a:fld id="{EBC03447-0147-4554-BDA5-EBA66A28CBC7}" type="datetimeFigureOut">
               <a:rPr lang="en-US" smtClean="0"/>
               <a:t>11/7/2009</a:t>
             </a:fld>
@@ -33243,7 +33220,7 @@
           <a:bodyPr/>
           <a:lstStyle/>
           <a:p>
-            <a:fld id="{A7A47041-28CD-4022-8C02-B4F073D293DE}" type="datetimeFigureOut">
+            <a:fld id="{FB25AAC0-6277-4C3F-990A-D84FF88E0838}" type="datetimeFigureOut">
               <a:rPr lang="en-US" smtClean="0"/>
               <a:t>11/7/2009</a:t>
             </a:fld>
@@ -38890,7 +38867,7 @@
           <a:bodyPr/>
           <a:lstStyle/>
           <a:p>
-            <a:fld id="{DBBCD5C7-6F8D-4884-BF3B-466DBC706F63}" type="datetimeFigureOut">
+            <a:fld id="{48539E1F-7DF2-4CFE-A92B-17346C5F633F}" type="datetimeFigureOut">
               <a:rPr lang="en-US" smtClean="0"/>
               <a:t>11/7/2009</a:t>
             </a:fld>
@@ -39279,7 +39256,7 @@
           <a:bodyPr/>
           <a:lstStyle/>
           <a:p>
-            <a:fld id="{E48593E2-59F7-42D5-AE5E-C92B50C1DA56}" type="datetimeFigureOut">
+            <a:fld id="{B37637AC-092B-4076-879B-C16016B4BD62}" type="datetimeFigureOut">
               <a:rPr lang="en-US" smtClean="0"/>
               <a:t>11/7/2009</a:t>
             </a:fld>
@@ -39392,7 +39369,7 @@
           <a:bodyPr/>
           <a:lstStyle/>
           <a:p>
-            <a:fld id="{9D9175C9-29B5-4ACD-B92B-207A45C5FF81}" type="datetimeFigureOut">
+            <a:fld id="{D3969F0C-7892-4854-A96C-FF6A24201D25}" type="datetimeFigureOut">
               <a:rPr lang="en-US" smtClean="0"/>
               <a:t>11/7/2009</a:t>
             </a:fld>
@@ -39482,7 +39459,7 @@
           <a:bodyPr/>
           <a:lstStyle/>
           <a:p>
-            <a:fld id="{32F62C30-D79D-4D75-8331-5E45D107648C}" type="datetimeFigureOut">
+            <a:fld id="{23BFC801-9A64-4DE7-90AD-F41EF5929C21}" type="datetimeFigureOut">
               <a:rPr lang="en-US" smtClean="0"/>
               <a:t>11/7/2009</a:t>
             </a:fld>
@@ -39737,7 +39714,7 @@
           <a:bodyPr/>
           <a:lstStyle/>
           <a:p>
-            <a:fld id="{1EF1B3F2-7DEB-495B-A920-DA947B57D528}" type="datetimeFigureOut">
+            <a:fld id="{F2911FF2-A421-4E3F-8E28-218211B155B3}" type="datetimeFigureOut">
               <a:rPr lang="en-US" smtClean="0"/>
               <a:t>11/7/2009</a:t>
             </a:fld>
@@ -39969,7 +39946,7 @@
           <a:bodyPr/>
           <a:lstStyle/>
           <a:p>
-            <a:fld id="{B14DE025-ED8A-4656-9D4E-FCF31043C198}" type="datetimeFigureOut">
+            <a:fld id="{45094195-0020-42A9-BC5E-323ACF929DA4}" type="datetimeFigureOut">
               <a:rPr lang="en-US" smtClean="0"/>
               <a:t>11/7/2009</a:t>
             </a:fld>
@@ -41830,10 +41807,16 @@
           <a:p>
             <a:pPr marL="0" indent="0"/>
             <a:r>
-              <a:rPr lang="en"/>
+              <a:rPr lang="en" b="1">
+                <a:latin typeface="Arial"/>
+                <a:cs typeface="Arial"/>
+              </a:rPr>
               <a:t>ПРОБЛЕМА И РЕШЕНИЕ</a:t>
             </a:r>
-            <a:endParaRPr lang="ru-RU"/>
+            <a:endParaRPr lang="ru-RU" b="1">
+              <a:latin typeface="Arial"/>
+              <a:cs typeface="Arial"/>
+            </a:endParaRPr>
           </a:p>
         </p:txBody>
       </p:sp>
@@ -41863,10 +41846,12 @@
           <a:lstStyle/>
           <a:p>
             <a:r>
-              <a:rPr lang="en"/>
+              <a:rPr lang="en" b="1">
+                <a:latin typeface="Arial"/>
+                <a:cs typeface="Arial"/>
+              </a:rPr>
               <a:t>ОГЛАВЛЕНИЕ</a:t>
             </a:r>
-            <a:endParaRPr lang="en"/>
           </a:p>
         </p:txBody>
       </p:sp>
@@ -41905,10 +41890,16 @@
               <a:buNone/>
             </a:pPr>
             <a:r>
-              <a:rPr lang="en"/>
+              <a:rPr lang="en" b="1">
+                <a:latin typeface="Arial"/>
+                <a:cs typeface="Arial"/>
+              </a:rPr>
               <a:t>01</a:t>
             </a:r>
-            <a:endParaRPr/>
+            <a:endParaRPr b="1">
+              <a:latin typeface="Arial"/>
+              <a:cs typeface="Arial"/>
+            </a:endParaRPr>
           </a:p>
         </p:txBody>
       </p:sp>
@@ -41947,10 +41938,16 @@
               <a:buNone/>
             </a:pPr>
             <a:r>
-              <a:rPr lang="en"/>
+              <a:rPr lang="en" b="1">
+                <a:latin typeface="Arial"/>
+                <a:cs typeface="Arial"/>
+              </a:rPr>
               <a:t>04</a:t>
             </a:r>
-            <a:endParaRPr/>
+            <a:endParaRPr b="1">
+              <a:latin typeface="Arial"/>
+              <a:cs typeface="Arial"/>
+            </a:endParaRPr>
           </a:p>
         </p:txBody>
       </p:sp>
@@ -41989,10 +41986,15 @@
               <a:buNone/>
             </a:pPr>
             <a:r>
-              <a:rPr lang="en"/>
+              <a:rPr lang="en" b="1">
+                <a:latin typeface="Arial"/>
+                <a:cs typeface="Arial"/>
+              </a:rPr>
               <a:t>02</a:t>
             </a:r>
-            <a:endParaRPr/>
+            <a:endParaRPr lang="ru-RU" b="1">
+              <a:cs typeface="Arial"/>
+            </a:endParaRPr>
           </a:p>
         </p:txBody>
       </p:sp>
@@ -42031,10 +42033,16 @@
               <a:buNone/>
             </a:pPr>
             <a:r>
-              <a:rPr lang="en"/>
+              <a:rPr lang="en" b="1">
+                <a:latin typeface="Arial"/>
+                <a:cs typeface="Arial"/>
+              </a:rPr>
               <a:t>05</a:t>
             </a:r>
-            <a:endParaRPr/>
+            <a:endParaRPr b="1">
+              <a:latin typeface="Arial"/>
+              <a:cs typeface="Arial"/>
+            </a:endParaRPr>
           </a:p>
         </p:txBody>
       </p:sp>
@@ -42073,10 +42081,16 @@
               <a:buNone/>
             </a:pPr>
             <a:r>
-              <a:rPr lang="en"/>
+              <a:rPr lang="en" b="1">
+                <a:latin typeface="Arial"/>
+                <a:cs typeface="Arial"/>
+              </a:rPr>
               <a:t>03</a:t>
             </a:r>
-            <a:endParaRPr/>
+            <a:endParaRPr b="1">
+              <a:latin typeface="Arial"/>
+              <a:cs typeface="Arial"/>
+            </a:endParaRPr>
           </a:p>
         </p:txBody>
       </p:sp>
@@ -42115,10 +42129,16 @@
               <a:buNone/>
             </a:pPr>
             <a:r>
-              <a:rPr lang="en"/>
+              <a:rPr lang="en" b="1">
+                <a:latin typeface="Arial"/>
+                <a:cs typeface="Arial"/>
+              </a:rPr>
               <a:t>06</a:t>
             </a:r>
-            <a:endParaRPr/>
+            <a:endParaRPr b="1">
+              <a:latin typeface="Arial"/>
+              <a:cs typeface="Arial"/>
+            </a:endParaRPr>
           </a:p>
         </p:txBody>
       </p:sp>
@@ -42157,10 +42177,12 @@
               <a:buNone/>
             </a:pPr>
             <a:r>
-              <a:rPr lang="en"/>
+              <a:rPr lang="en" b="1">
+                <a:latin typeface="Arial"/>
+                <a:cs typeface="Arial"/>
+              </a:rPr>
               <a:t>ВВЕДЕНИЕ</a:t>
             </a:r>
-            <a:endParaRPr lang="en"/>
           </a:p>
         </p:txBody>
       </p:sp>
@@ -42191,10 +42213,16 @@
           <a:p>
             <a:pPr marL="0" indent="0"/>
             <a:r>
-              <a:rPr lang="en"/>
+              <a:rPr lang="en" b="1">
+                <a:latin typeface="Arial"/>
+                <a:cs typeface="Arial"/>
+              </a:rPr>
               <a:t>РЫНОЧНАЯ ВОЗМОЖНОСТЬ</a:t>
             </a:r>
-            <a:endParaRPr lang="ru-RU"/>
+            <a:endParaRPr lang="ru-RU">
+              <a:latin typeface="Arial"/>
+              <a:cs typeface="Arial"/>
+            </a:endParaRPr>
           </a:p>
         </p:txBody>
       </p:sp>
@@ -42225,10 +42253,15 @@
           <a:p>
             <a:pPr marL="0" indent="0"/>
             <a:r>
-              <a:rPr lang="en"/>
+              <a:rPr lang="en" b="1">
+                <a:latin typeface="Arial"/>
+                <a:cs typeface="Arial"/>
+              </a:rPr>
               <a:t>ДЕМОНСТРАЦИЯ ПРОДУКТА </a:t>
             </a:r>
-            <a:endParaRPr lang="ru-RU"/>
+            <a:endParaRPr lang="ru-RU" b="1">
+              <a:cs typeface="Arial"/>
+            </a:endParaRPr>
           </a:p>
         </p:txBody>
       </p:sp>
@@ -42259,10 +42292,16 @@
           <a:p>
             <a:pPr marL="0" indent="0"/>
             <a:r>
-              <a:rPr lang="en"/>
+              <a:rPr lang="en" b="1">
+                <a:latin typeface="Arial"/>
+                <a:cs typeface="Arial"/>
+              </a:rPr>
               <a:t>КОМАНДА И ГРАФИК РАБОТЫ </a:t>
             </a:r>
-            <a:endParaRPr lang="ru-RU"/>
+            <a:endParaRPr lang="ru-RU" b="1">
+              <a:latin typeface="Arial"/>
+              <a:cs typeface="Arial"/>
+            </a:endParaRPr>
           </a:p>
         </p:txBody>
       </p:sp>
@@ -42293,10 +42332,16 @@
           <a:p>
             <a:pPr marL="0" indent="0"/>
             <a:r>
-              <a:rPr lang="en"/>
+              <a:rPr lang="en" b="1">
+                <a:latin typeface="Arial"/>
+                <a:cs typeface="Arial"/>
+              </a:rPr>
               <a:t>ФИНАНСЫ И МЕТРИКИ</a:t>
             </a:r>
-            <a:endParaRPr lang="ru-RU"/>
+            <a:endParaRPr lang="ru-RU" b="1">
+              <a:latin typeface="Arial"/>
+              <a:cs typeface="Arial"/>
+            </a:endParaRPr>
           </a:p>
         </p:txBody>
       </p:sp>

--- a/slides/slide_02.pptx
+++ b/slides/slide_02.pptx
@@ -886,7 +886,7 @@
           <a:bodyPr/>
           <a:lstStyle/>
           <a:p>
-            <a:fld id="{A5156A0B-CD3A-4364-A8B3-0FA8763E9F57}" type="datetimeFigureOut">
+            <a:fld id="{699310EE-CD69-4417-B12F-29E802436E42}" type="datetimeFigureOut">
               <a:rPr lang="en-US" smtClean="0"/>
               <a:t>11/7/2009</a:t>
             </a:fld>
@@ -1050,7 +1050,7 @@
           <a:bodyPr/>
           <a:lstStyle/>
           <a:p>
-            <a:fld id="{5F2553CF-E7EB-430D-B1A0-85F19504BBDD}" type="datetimeFigureOut">
+            <a:fld id="{6E807A49-E00E-49CD-9FB2-DA456F241943}" type="datetimeFigureOut">
               <a:rPr lang="en-US" smtClean="0"/>
               <a:t>11/7/2009</a:t>
             </a:fld>
@@ -1214,7 +1214,7 @@
           <a:bodyPr/>
           <a:lstStyle/>
           <a:p>
-            <a:fld id="{1F393D5A-D904-463D-9CC3-A77439BE8FC2}" type="datetimeFigureOut">
+            <a:fld id="{DCD09AD1-85C8-4F34-8477-5768A081A297}" type="datetimeFigureOut">
               <a:rPr lang="en-US" smtClean="0"/>
               <a:t>11/7/2009</a:t>
             </a:fld>
@@ -13119,7 +13119,7 @@
           <a:bodyPr/>
           <a:lstStyle/>
           <a:p>
-            <a:fld id="{EBC03447-0147-4554-BDA5-EBA66A28CBC7}" type="datetimeFigureOut">
+            <a:fld id="{56720EA3-7AB8-4736-B21B-4D8C0737CE0F}" type="datetimeFigureOut">
               <a:rPr lang="en-US" smtClean="0"/>
               <a:t>11/7/2009</a:t>
             </a:fld>
@@ -33220,7 +33220,7 @@
           <a:bodyPr/>
           <a:lstStyle/>
           <a:p>
-            <a:fld id="{FB25AAC0-6277-4C3F-990A-D84FF88E0838}" type="datetimeFigureOut">
+            <a:fld id="{E6285684-AD03-4579-BB23-026E1C866024}" type="datetimeFigureOut">
               <a:rPr lang="en-US" smtClean="0"/>
               <a:t>11/7/2009</a:t>
             </a:fld>
@@ -38867,7 +38867,7 @@
           <a:bodyPr/>
           <a:lstStyle/>
           <a:p>
-            <a:fld id="{48539E1F-7DF2-4CFE-A92B-17346C5F633F}" type="datetimeFigureOut">
+            <a:fld id="{66275927-92D4-4B19-B281-497E9081A74D}" type="datetimeFigureOut">
               <a:rPr lang="en-US" smtClean="0"/>
               <a:t>11/7/2009</a:t>
             </a:fld>
@@ -39256,7 +39256,7 @@
           <a:bodyPr/>
           <a:lstStyle/>
           <a:p>
-            <a:fld id="{B37637AC-092B-4076-879B-C16016B4BD62}" type="datetimeFigureOut">
+            <a:fld id="{B4FFAD8E-E0BA-4B6C-B605-B4875D50B186}" type="datetimeFigureOut">
               <a:rPr lang="en-US" smtClean="0"/>
               <a:t>11/7/2009</a:t>
             </a:fld>
@@ -39369,7 +39369,7 @@
           <a:bodyPr/>
           <a:lstStyle/>
           <a:p>
-            <a:fld id="{D3969F0C-7892-4854-A96C-FF6A24201D25}" type="datetimeFigureOut">
+            <a:fld id="{89E0DBA0-72A1-4D0D-B6D2-60E0C548C85A}" type="datetimeFigureOut">
               <a:rPr lang="en-US" smtClean="0"/>
               <a:t>11/7/2009</a:t>
             </a:fld>
@@ -39459,7 +39459,7 @@
           <a:bodyPr/>
           <a:lstStyle/>
           <a:p>
-            <a:fld id="{23BFC801-9A64-4DE7-90AD-F41EF5929C21}" type="datetimeFigureOut">
+            <a:fld id="{587CFCAD-DDF9-4896-AA24-826112B0279D}" type="datetimeFigureOut">
               <a:rPr lang="en-US" smtClean="0"/>
               <a:t>11/7/2009</a:t>
             </a:fld>
@@ -39714,7 +39714,7 @@
           <a:bodyPr/>
           <a:lstStyle/>
           <a:p>
-            <a:fld id="{F2911FF2-A421-4E3F-8E28-218211B155B3}" type="datetimeFigureOut">
+            <a:fld id="{E19A42F3-0AB4-4F37-9A58-42507E5EF3A5}" type="datetimeFigureOut">
               <a:rPr lang="en-US" smtClean="0"/>
               <a:t>11/7/2009</a:t>
             </a:fld>
@@ -39946,7 +39946,7 @@
           <a:bodyPr/>
           <a:lstStyle/>
           <a:p>
-            <a:fld id="{45094195-0020-42A9-BC5E-323ACF929DA4}" type="datetimeFigureOut">
+            <a:fld id="{E8D28B09-7CF2-4A67-9091-AC97FF94645D}" type="datetimeFigureOut">
               <a:rPr lang="en-US" smtClean="0"/>
               <a:t>11/7/2009</a:t>
             </a:fld>
